--- a/dist/초3/영어/듣기와말하기/초3_영어_듣기와말하기_01_인사하기.pptx
+++ b/dist/초3/영어/듣기와말하기/초3_영어_듣기와말하기_01_인사하기.pptx
@@ -121,13 +121,13 @@
   <p:extLst>
     <p:ext uri="{521415D9-36F7-43E2-AB2F-B90AF26B5E84}">
       <p14:sectionLst xmlns:p14="http://schemas.microsoft.com/office/powerpoint/2010/main">
-        <p14:section name="도입" id="{d608b47a-9a90-1de8-3d2c-d236e52a9b54}">
+        <p14:section name="도입" id="{6edeaf39-d755-8755-e3d7-21775154082d}">
           <p14:sldIdLst>
             <p14:sldId id="256"/>
             <p14:sldId id="257"/>
           </p14:sldIdLst>
         </p14:section>
-        <p14:section name="개념" id="{3bf89476-a66c-e967-01bd-b74ced4c64da}">
+        <p14:section name="개념" id="{e16a091b-61f6-f7d2-800c-135608d54688}">
           <p14:sldIdLst>
             <p14:sldId id="258"/>
             <p14:sldId id="259"/>
@@ -135,7 +135,7 @@
             <p14:sldId id="263"/>
           </p14:sldIdLst>
         </p14:section>
-        <p14:section name="연습" id="{ab89f584-b08e-c68b-1166-b829c2320cda}">
+        <p14:section name="연습" id="{23e4c155-4cae-fb4b-b2ea-8f0201daa2ec}">
           <p14:sldIdLst>
             <p14:sldId id="260"/>
             <p14:sldId id="261"/>
@@ -143,25 +143,25 @@
             <p14:sldId id="265"/>
           </p14:sldIdLst>
         </p14:section>
-        <p14:section name="개념" id="{6e2afa57-63bd-a2c3-537e-d978c981ee15}">
+        <p14:section name="개념" id="{fc7cf550-6995-6eab-590b-2dbf7490fbd3}">
           <p14:sldIdLst/>
         </p14:section>
-        <p14:section name="연습" id="{114403b9-bceb-fd67-6f4e-1fd69e109330}">
+        <p14:section name="연습" id="{65995c8c-d84e-0fc2-85bc-963319a32f1c}">
           <p14:sldIdLst/>
         </p14:section>
-        <p14:section name="확인" id="{286e2590-b496-e8cf-0a1f-44fc204aeda2}">
+        <p14:section name="확인" id="{adb0052c-824c-7856-66b1-1a5a16a99b60}">
           <p14:sldIdLst>
             <p14:sldId id="266"/>
             <p14:sldId id="267"/>
             <p14:sldId id="268"/>
           </p14:sldIdLst>
         </p14:section>
-        <p14:section name="정리" id="{517a87ff-0187-5fbc-c67e-d1a5df233213}">
+        <p14:section name="정리" id="{2f4477b8-ca8c-8bb5-0c8d-96f3129f50ab}">
           <p14:sldIdLst>
             <p14:sldId id="269"/>
           </p14:sldIdLst>
         </p14:section>
-        <p14:section name="보충" id="{be787f46-cdbf-4826-c557-98b1862ef15a}">
+        <p14:section name="보충" id="{0d230549-a96a-83c3-a75f-8a3f1c991fb5}">
           <p14:sldIdLst>
             <p14:sldId id="270"/>
           </p14:sldIdLst>
@@ -3188,7 +3188,7 @@
               <a:buNone/>
             </a:pPr>
             <a:r>
-              <a:rPr lang="ko-KR" altLang="en-US" sz="3400" b="1" dirty="0">
+              <a:rPr lang="en-US" altLang="ko-KR" sz="3400" b="1" dirty="0">
                 <a:solidFill>
                   <a:srgbClr val="1F2937"/>
                 </a:solidFill>
@@ -3235,7 +3235,7 @@
               <a:buNone/>
             </a:pPr>
             <a:r>
-              <a:rPr lang="ko-KR" altLang="en-US" sz="3400" b="1" dirty="0">
+              <a:rPr lang="en-US" altLang="ko-KR" sz="3400" b="1" dirty="0">
                 <a:solidFill>
                   <a:srgbClr val="1F2937"/>
                 </a:solidFill>
@@ -3604,7 +3604,7 @@
               <a:buNone/>
             </a:pPr>
             <a:r>
-              <a:rPr lang="ko-KR" altLang="en-US" sz="3000" dirty="0">
+              <a:rPr lang="en-US" altLang="ko-KR" sz="3000" dirty="0">
                 <a:solidFill>
                   <a:srgbClr val="1F2937"/>
                 </a:solidFill>
@@ -3621,7 +3621,7 @@
               <a:buNone/>
             </a:pPr>
             <a:r>
-              <a:rPr lang="ko-KR" altLang="en-US" sz="3000" dirty="0">
+              <a:rPr lang="en-US" altLang="ko-KR" sz="3000" dirty="0">
                 <a:solidFill>
                   <a:srgbClr val="1F2937"/>
                 </a:solidFill>
@@ -3707,7 +3707,7 @@
               <a:buNone/>
             </a:pPr>
             <a:r>
-              <a:rPr lang="ko-KR" altLang="en-US" sz="3000" dirty="0">
+              <a:rPr lang="en-US" altLang="ko-KR" sz="3000" dirty="0">
                 <a:solidFill>
                   <a:srgbClr val="1F2937"/>
                 </a:solidFill>
@@ -3724,7 +3724,7 @@
               <a:buNone/>
             </a:pPr>
             <a:r>
-              <a:rPr lang="ko-KR" altLang="en-US" sz="3000" dirty="0">
+              <a:rPr lang="en-US" altLang="ko-KR" sz="3000" dirty="0">
                 <a:solidFill>
                   <a:srgbClr val="1F2937"/>
                 </a:solidFill>
@@ -3810,7 +3810,7 @@
               <a:buNone/>
             </a:pPr>
             <a:r>
-              <a:rPr lang="ko-KR" altLang="en-US" sz="3000" dirty="0">
+              <a:rPr lang="en-US" altLang="ko-KR" sz="3000" dirty="0">
                 <a:solidFill>
                   <a:srgbClr val="1F2937"/>
                 </a:solidFill>
@@ -3827,7 +3827,7 @@
               <a:buNone/>
             </a:pPr>
             <a:r>
-              <a:rPr lang="ko-KR" altLang="en-US" sz="3000" dirty="0">
+              <a:rPr lang="en-US" altLang="ko-KR" sz="3000" dirty="0">
                 <a:solidFill>
                   <a:srgbClr val="1F2937"/>
                 </a:solidFill>
@@ -4507,7 +4507,7 @@
               <a:buNone/>
             </a:pPr>
             <a:r>
-              <a:rPr lang="ko-KR" altLang="en-US" sz="3000" dirty="0">
+              <a:rPr lang="en-US" altLang="ko-KR" sz="3000" dirty="0">
                 <a:solidFill>
                   <a:srgbClr val="1F2937"/>
                 </a:solidFill>
@@ -4546,7 +4546,7 @@
               <a:buNone/>
             </a:pPr>
             <a:r>
-              <a:rPr lang="ko-KR" altLang="en-US" sz="3000" dirty="0">
+              <a:rPr lang="en-US" altLang="ko-KR" sz="3000" dirty="0">
                 <a:solidFill>
                   <a:srgbClr val="1F2937"/>
                 </a:solidFill>
@@ -4563,7 +4563,7 @@
               <a:buNone/>
             </a:pPr>
             <a:r>
-              <a:rPr lang="ko-KR" altLang="en-US" sz="3000" dirty="0">
+              <a:rPr lang="en-US" altLang="ko-KR" sz="3000" dirty="0">
                 <a:solidFill>
                   <a:srgbClr val="1F2937"/>
                 </a:solidFill>
@@ -4602,7 +4602,7 @@
               <a:buNone/>
             </a:pPr>
             <a:r>
-              <a:rPr lang="ko-KR" altLang="en-US" sz="3000" dirty="0">
+              <a:rPr lang="en-US" altLang="ko-KR" sz="3000" dirty="0">
                 <a:solidFill>
                   <a:srgbClr val="1F2937"/>
                 </a:solidFill>
@@ -5026,7 +5026,7 @@
               <a:buNone/>
             </a:pPr>
             <a:r>
-              <a:rPr lang="ko-KR" altLang="en-US" sz="3000" dirty="0">
+              <a:rPr lang="en-US" altLang="ko-KR" sz="3000" dirty="0">
                 <a:solidFill>
                   <a:srgbClr val="1F2937"/>
                 </a:solidFill>
@@ -5142,7 +5142,7 @@
               <a:buNone/>
             </a:pPr>
             <a:r>
-              <a:rPr lang="ko-KR" altLang="en-US" sz="3000" dirty="0">
+              <a:rPr lang="en-US" altLang="ko-KR" sz="3000" dirty="0">
                 <a:solidFill>
                   <a:srgbClr val="1F2937"/>
                 </a:solidFill>
@@ -5258,7 +5258,7 @@
               <a:buNone/>
             </a:pPr>
             <a:r>
-              <a:rPr lang="ko-KR" altLang="en-US" sz="3000" dirty="0">
+              <a:rPr lang="en-US" altLang="ko-KR" sz="3000" dirty="0">
                 <a:solidFill>
                   <a:srgbClr val="1F2937"/>
                 </a:solidFill>
@@ -6666,7 +6666,7 @@
               <a:buNone/>
             </a:pPr>
             <a:r>
-              <a:rPr lang="ko-KR" altLang="en-US" sz="3400" b="1" dirty="0">
+              <a:rPr lang="en-US" altLang="ko-KR" sz="3400" b="1" dirty="0">
                 <a:solidFill>
                   <a:srgbClr val="1F2937"/>
                 </a:solidFill>
@@ -6730,7 +6730,7 @@
               <a:buNone/>
             </a:pPr>
             <a:r>
-              <a:rPr lang="ko-KR" altLang="en-US" sz="3400" b="1" dirty="0">
+              <a:rPr lang="en-US" altLang="ko-KR" sz="3400" b="1" dirty="0">
                 <a:solidFill>
                   <a:srgbClr val="1F2937"/>
                 </a:solidFill>
@@ -6977,7 +6977,7 @@
               <a:buNone/>
             </a:pPr>
             <a:r>
-              <a:rPr lang="ko-KR" altLang="en-US" sz="3400" b="1" dirty="0">
+              <a:rPr lang="en-US" altLang="ko-KR" sz="3400" b="1" dirty="0">
                 <a:solidFill>
                   <a:srgbClr val="1F2937"/>
                 </a:solidFill>
@@ -7041,7 +7041,7 @@
               <a:buNone/>
             </a:pPr>
             <a:r>
-              <a:rPr lang="ko-KR" altLang="en-US" sz="3400" b="1" dirty="0">
+              <a:rPr lang="en-US" altLang="ko-KR" sz="3400" b="1" dirty="0">
                 <a:solidFill>
                   <a:srgbClr val="1F2937"/>
                 </a:solidFill>
@@ -7884,7 +7884,7 @@
               <a:buNone/>
             </a:pPr>
             <a:r>
-              <a:rPr lang="ko-KR" altLang="en-US" sz="3400" b="1" dirty="0">
+              <a:rPr lang="en-US" altLang="ko-KR" sz="3400" b="1" dirty="0">
                 <a:solidFill>
                   <a:srgbClr val="1F2937"/>
                 </a:solidFill>
@@ -7931,7 +7931,7 @@
               <a:buNone/>
             </a:pPr>
             <a:r>
-              <a:rPr lang="ko-KR" altLang="en-US" sz="3400" b="1" dirty="0">
+              <a:rPr lang="en-US" altLang="ko-KR" sz="3400" b="1" dirty="0">
                 <a:solidFill>
                   <a:srgbClr val="1F2937"/>
                 </a:solidFill>
@@ -8025,7 +8025,7 @@
               <a:buNone/>
             </a:pPr>
             <a:r>
-              <a:rPr lang="ko-KR" altLang="en-US" sz="3400" b="1" dirty="0">
+              <a:rPr lang="en-US" altLang="ko-KR" sz="3400" b="1" dirty="0">
                 <a:solidFill>
                   <a:srgbClr val="1F2937"/>
                 </a:solidFill>
@@ -8072,7 +8072,7 @@
               <a:buNone/>
             </a:pPr>
             <a:r>
-              <a:rPr lang="ko-KR" altLang="en-US" sz="3400" b="1" dirty="0">
+              <a:rPr lang="en-US" altLang="ko-KR" sz="3400" b="1" dirty="0">
                 <a:solidFill>
                   <a:srgbClr val="1F2937"/>
                 </a:solidFill>
@@ -8302,7 +8302,7 @@
               <a:buNone/>
             </a:pPr>
             <a:r>
-              <a:rPr lang="ko-KR" altLang="en-US" sz="3400" b="1" dirty="0">
+              <a:rPr lang="en-US" altLang="ko-KR" sz="3400" b="1" dirty="0">
                 <a:solidFill>
                   <a:srgbClr val="1F2937"/>
                 </a:solidFill>
@@ -8366,7 +8366,7 @@
               <a:buNone/>
             </a:pPr>
             <a:r>
-              <a:rPr lang="ko-KR" altLang="en-US" sz="3400" b="1" dirty="0">
+              <a:rPr lang="en-US" altLang="ko-KR" sz="3400" b="1" dirty="0">
                 <a:solidFill>
                   <a:srgbClr val="1F2937"/>
                 </a:solidFill>
@@ -8613,7 +8613,7 @@
               <a:buNone/>
             </a:pPr>
             <a:r>
-              <a:rPr lang="ko-KR" altLang="en-US" sz="3400" b="1" dirty="0">
+              <a:rPr lang="en-US" altLang="ko-KR" sz="3400" b="1" dirty="0">
                 <a:solidFill>
                   <a:srgbClr val="1F2937"/>
                 </a:solidFill>
@@ -8677,7 +8677,7 @@
               <a:buNone/>
             </a:pPr>
             <a:r>
-              <a:rPr lang="ko-KR" altLang="en-US" sz="3400" b="1" dirty="0">
+              <a:rPr lang="en-US" altLang="ko-KR" sz="3400" b="1" dirty="0">
                 <a:solidFill>
                   <a:srgbClr val="1F2937"/>
                 </a:solidFill>
@@ -8942,7 +8942,7 @@
               <a:buNone/>
             </a:pPr>
             <a:r>
-              <a:rPr lang="ko-KR" altLang="en-US" sz="2800" dirty="0">
+              <a:rPr lang="en-US" altLang="ko-KR" sz="2800" dirty="0">
                 <a:solidFill>
                   <a:srgbClr val="1F2937"/>
                 </a:solidFill>
@@ -8965,7 +8965,7 @@
               <a:buNone/>
             </a:pPr>
             <a:r>
-              <a:rPr lang="ko-KR" altLang="en-US" sz="2800" dirty="0">
+              <a:rPr lang="en-US" altLang="ko-KR" sz="2800" dirty="0">
                 <a:solidFill>
                   <a:srgbClr val="1F2937"/>
                 </a:solidFill>
@@ -8988,7 +8988,7 @@
               <a:buNone/>
             </a:pPr>
             <a:r>
-              <a:rPr lang="ko-KR" altLang="en-US" sz="2800" dirty="0">
+              <a:rPr lang="en-US" altLang="ko-KR" sz="2800" dirty="0">
                 <a:solidFill>
                   <a:srgbClr val="1F2937"/>
                 </a:solidFill>
@@ -9034,7 +9034,7 @@
               <a:buNone/>
             </a:pPr>
             <a:r>
-              <a:rPr lang="ko-KR" altLang="en-US" sz="2800" dirty="0">
+              <a:rPr lang="en-US" altLang="ko-KR" sz="2800" dirty="0">
                 <a:solidFill>
                   <a:srgbClr val="1F2937"/>
                 </a:solidFill>
@@ -9057,7 +9057,7 @@
               <a:buNone/>
             </a:pPr>
             <a:r>
-              <a:rPr lang="ko-KR" altLang="en-US" sz="2800" dirty="0">
+              <a:rPr lang="en-US" altLang="ko-KR" sz="2800" dirty="0">
                 <a:solidFill>
                   <a:srgbClr val="1F2937"/>
                 </a:solidFill>

--- a/dist/초3/영어/듣기와말하기/초3_영어_듣기와말하기_01_인사하기.pptx
+++ b/dist/초3/영어/듣기와말하기/초3_영어_듣기와말하기_01_인사하기.pptx
@@ -121,13 +121,13 @@
   <p:extLst>
     <p:ext uri="{521415D9-36F7-43E2-AB2F-B90AF26B5E84}">
       <p14:sectionLst xmlns:p14="http://schemas.microsoft.com/office/powerpoint/2010/main">
-        <p14:section name="도입" id="{6edeaf39-d755-8755-e3d7-21775154082d}">
+        <p14:section name="도입" id="{3e7f7610-d0f0-5c83-dc50-d638780a7459}">
           <p14:sldIdLst>
             <p14:sldId id="256"/>
             <p14:sldId id="257"/>
           </p14:sldIdLst>
         </p14:section>
-        <p14:section name="개념" id="{e16a091b-61f6-f7d2-800c-135608d54688}">
+        <p14:section name="개념" id="{c52c3cca-2077-53f9-6791-31a91acee66a}">
           <p14:sldIdLst>
             <p14:sldId id="258"/>
             <p14:sldId id="259"/>
@@ -135,7 +135,7 @@
             <p14:sldId id="263"/>
           </p14:sldIdLst>
         </p14:section>
-        <p14:section name="연습" id="{23e4c155-4cae-fb4b-b2ea-8f0201daa2ec}">
+        <p14:section name="연습" id="{77ef530d-2f27-4ddb-77f9-c5b194627301}">
           <p14:sldIdLst>
             <p14:sldId id="260"/>
             <p14:sldId id="261"/>
@@ -143,25 +143,25 @@
             <p14:sldId id="265"/>
           </p14:sldIdLst>
         </p14:section>
-        <p14:section name="개념" id="{fc7cf550-6995-6eab-590b-2dbf7490fbd3}">
+        <p14:section name="개념" id="{1816ec2e-3a39-dfcc-a786-c70c4e0a139c}">
           <p14:sldIdLst/>
         </p14:section>
-        <p14:section name="연습" id="{65995c8c-d84e-0fc2-85bc-963319a32f1c}">
+        <p14:section name="연습" id="{a229fdd1-6a4e-98c5-8a74-721ba63cf9fc}">
           <p14:sldIdLst/>
         </p14:section>
-        <p14:section name="확인" id="{adb0052c-824c-7856-66b1-1a5a16a99b60}">
+        <p14:section name="확인" id="{d1654fc1-f91e-9780-612e-180f61b2e5cf}">
           <p14:sldIdLst>
             <p14:sldId id="266"/>
             <p14:sldId id="267"/>
             <p14:sldId id="268"/>
           </p14:sldIdLst>
         </p14:section>
-        <p14:section name="정리" id="{2f4477b8-ca8c-8bb5-0c8d-96f3129f50ab}">
+        <p14:section name="정리" id="{e03deea9-601c-58b0-d7da-3a174c71ec39}">
           <p14:sldIdLst>
             <p14:sldId id="269"/>
           </p14:sldIdLst>
         </p14:section>
-        <p14:section name="보충" id="{0d230549-a96a-83c3-a75f-8a3f1c991fb5}">
+        <p14:section name="보충" id="{ce3fbe00-878c-c617-a885-f7e07ec264f5}">
           <p14:sldIdLst>
             <p14:sldId id="270"/>
           </p14:sldIdLst>
